--- a/presentation/AgentPulse_Project_Deck.pptx
+++ b/presentation/AgentPulse_Project_Deck.pptx
@@ -7663,7 +7663,7 @@
                   <a:srgbClr val="14171F"/>
                 </a:solidFill>
               </a:rPr>
-              <a:t>docker compose builds API, worker and an nginx-served dashboard.</a:t>
+              <a:t>docker compose builds the API and dashboard only - it defines no worker service, so a Compose deployment stores spans without evaluating them.</a:t>
             </a:r>
             <a:endParaRPr lang="en-US" sz="1350" dirty="0"/>
           </a:p>
